--- a/Module_07/Slides/7.2_Data Modelling and Relationships.pptx
+++ b/Module_07/Slides/7.2_Data Modelling and Relationships.pptx
@@ -492,12 +492,12 @@
           <a:p>
             <a:r>
               <a:rPr lang="en-US" dirty="0"/>
-              <a:t>PREDICT-THEN-RUN. This is Module 3's signature technique, and naming it every time is what makes it transfer. Before building the relationship in the demo, ask the room to state on paper how many delivery rows will show for Chidi Okafor, and why. Then run it and reconcile.
+              <a:t>PREDICT-THEN-RUN. This is Module 3's signature technique, and naming it every time is what makes it transfer. Before building the relationship in the demo, ask the room to state on paper how many delivery rows will show for Fatima Abubakar, and why. Then run it and reconcile.
 WHAT TO SAY (about four minutes):
 "On the left, riders. Three rows, three different riders. Each Rider ID appears exactly once. That is your primary key from Module 3, and Power BI will refuse the relationship, or quietly degrade it, if that is not true.
 On the right, deliveries. Look at R-014. It appears three times in six rows. Is that duplication? No. That is the point. Each delivery is pointing back at the rider who made it.
 So: the one side must hold each key exactly once. The many side may repeat it as often as it likes.
-Before I build this, write down on paper: how many delivery rows do you expect for Chidi Okafor? You did exactly this with joins in Module 3. Same move."
+Before I build this, write down on paper: how many delivery rows do you expect for Fatima Abubakar? You did exactly this with joins in Module 3. Same move."
 TIMING: 4 minutes.</a:t>
             </a:r>
           </a:p>
@@ -1885,10 +1885,10 @@
             <a:r>
               <a:rPr lang="en-US" dirty="0"/>
               <a:t>SLOW DOWN HERE. This is the explanatory heart of the topic.
-THE CONTENT IN FULL: when you flatten, the rider's details stop being facts about a rider and become attributes of a delivery. Chidi Okafor does not appear once in this table. He appears 607 times, once per delivery. So counting that column counts deliveries, not riders.
+THE CONTENT IN FULL: when you flatten, the rider's details stop being facts about a rider and become attributes of a delivery. Fatima Abubakar does not appear once in this table. She appears 617 times, once per delivery. So counting that column counts deliveries, not riders.
 Connect it explicitly back to Topic 7.1, where you made them say "one row per what". The flat table's grain is one row per delivery. Every question it answers is a delivery question.
 WHAT TO SAY (about five minutes):
-"Look at these six rows. Chidi Okafor, rider R-014, appears four times in six rows. Not because the data is corrupt. Because he made four of these six deliveries.
+"Look at these six rows. Fatima Abubakar, rider R-014, appears four times in six rows. Not because the data is corrupt. Because he made four of these six deliveries.
 In the real table he appears six hundred and seven times.
 So when you count that column, what are you counting? You are counting deliveries that happen to have his name written next to them. The rider stopped being a rider and became an attribute of a delivery.
 Remember the word from last topic. Grain. One row per what. The grain of this table is one row per delivery, so every single question it can answer is a question about deliveries. Power BI did not make a mistake. It answered exactly what you asked."
@@ -6012,7 +6012,7 @@
                 <a:ea typeface="Poppins" pitchFamily="34" charset="-122"/>
                 <a:cs typeface="Poppins" pitchFamily="34" charset="-120"/>
               </a:rPr>
-              <a:t>R-014   Chidi Okafor</a:t>
+              <a:t>R-014   Fatima Abubakar</a:t>
             </a:r>
             <a:endParaRPr lang="en-US" sz="1200" dirty="0"/>
           </a:p>
@@ -6051,7 +6051,7 @@
                 <a:ea typeface="Poppins" pitchFamily="34" charset="-122"/>
                 <a:cs typeface="Poppins" pitchFamily="34" charset="-120"/>
               </a:rPr>
-              <a:t>R-022   Bisi Adeyemi</a:t>
+              <a:t>R-022   Aisha Adeleke</a:t>
             </a:r>
             <a:endParaRPr lang="en-US" sz="1200" dirty="0"/>
           </a:p>
@@ -6090,7 +6090,7 @@
                 <a:ea typeface="Poppins" pitchFamily="34" charset="-122"/>
                 <a:cs typeface="Poppins" pitchFamily="34" charset="-120"/>
               </a:rPr>
-              <a:t>R-041   Musa Bello</a:t>
+              <a:t>R-041   Emeka Nwosu</a:t>
             </a:r>
             <a:endParaRPr lang="en-US" sz="1200" dirty="0"/>
           </a:p>
@@ -6338,7 +6338,7 @@
                 <a:ea typeface="Poppins" pitchFamily="34" charset="-122"/>
                 <a:cs typeface="Poppins" pitchFamily="34" charset="-120"/>
               </a:rPr>
-              <a:t>D-000117</a:t>
+              <a:t>D-000019</a:t>
             </a:r>
             <a:endParaRPr lang="en-US" sz="1150" dirty="0"/>
           </a:p>
@@ -6416,7 +6416,7 @@
                 <a:ea typeface="Poppins" pitchFamily="34" charset="-122"/>
                 <a:cs typeface="Poppins" pitchFamily="34" charset="-120"/>
               </a:rPr>
-              <a:t>D-000118</a:t>
+              <a:t>D-000037</a:t>
             </a:r>
             <a:endParaRPr lang="en-US" sz="1150" dirty="0"/>
           </a:p>
@@ -6514,7 +6514,7 @@
                 <a:ea typeface="Poppins" pitchFamily="34" charset="-122"/>
                 <a:cs typeface="Poppins" pitchFamily="34" charset="-120"/>
               </a:rPr>
-              <a:t>D-000119</a:t>
+              <a:t>D-000239</a:t>
             </a:r>
             <a:endParaRPr lang="en-US" sz="1150" dirty="0"/>
           </a:p>
@@ -6592,7 +6592,7 @@
                 <a:ea typeface="Poppins" pitchFamily="34" charset="-122"/>
                 <a:cs typeface="Poppins" pitchFamily="34" charset="-120"/>
               </a:rPr>
-              <a:t>D-000120</a:t>
+              <a:t>D-000031</a:t>
             </a:r>
             <a:endParaRPr lang="en-US" sz="1150" dirty="0"/>
           </a:p>
@@ -6690,7 +6690,7 @@
                 <a:ea typeface="Poppins" pitchFamily="34" charset="-122"/>
                 <a:cs typeface="Poppins" pitchFamily="34" charset="-120"/>
               </a:rPr>
-              <a:t>D-000121</a:t>
+              <a:t>D-000369</a:t>
             </a:r>
             <a:endParaRPr lang="en-US" sz="1150" dirty="0"/>
           </a:p>
@@ -6768,7 +6768,7 @@
                 <a:ea typeface="Poppins" pitchFamily="34" charset="-122"/>
                 <a:cs typeface="Poppins" pitchFamily="34" charset="-120"/>
               </a:rPr>
-              <a:t>D-000122</a:t>
+              <a:t>D-000125</a:t>
             </a:r>
             <a:endParaRPr lang="en-US" sz="1150" dirty="0"/>
           </a:p>
@@ -17567,7 +17567,7 @@
                 <a:ea typeface="Poppins" pitchFamily="34" charset="-122"/>
                 <a:cs typeface="Poppins" pitchFamily="34" charset="-120"/>
               </a:rPr>
-              <a:t>D-000117</a:t>
+              <a:t>D-000019</a:t>
             </a:r>
             <a:endParaRPr lang="en-US" sz="1050" dirty="0"/>
           </a:p>
@@ -17645,7 +17645,7 @@
                 <a:ea typeface="Poppins" pitchFamily="34" charset="-122"/>
                 <a:cs typeface="Poppins" pitchFamily="34" charset="-120"/>
               </a:rPr>
-              <a:t>Chidi Okonkwo</a:t>
+              <a:t>Fatima Abubakar</a:t>
             </a:r>
             <a:endParaRPr lang="en-US" sz="1050" dirty="0"/>
           </a:p>
@@ -17684,7 +17684,7 @@
                 <a:ea typeface="Poppins" pitchFamily="34" charset="-122"/>
                 <a:cs typeface="Poppins" pitchFamily="34" charset="-120"/>
               </a:rPr>
-              <a:t>Apapa</a:t>
+              <a:t>Ikeja</a:t>
             </a:r>
             <a:endParaRPr lang="en-US" sz="1050" dirty="0"/>
           </a:p>
@@ -17723,7 +17723,7 @@
                 <a:ea typeface="Poppins" pitchFamily="34" charset="-122"/>
                 <a:cs typeface="Poppins" pitchFamily="34" charset="-120"/>
               </a:rPr>
-              <a:t>D-000118</a:t>
+              <a:t>D-000001</a:t>
             </a:r>
             <a:endParaRPr lang="en-US" sz="1050" dirty="0"/>
           </a:p>
@@ -17762,7 +17762,7 @@
                 <a:ea typeface="Poppins" pitchFamily="34" charset="-122"/>
                 <a:cs typeface="Poppins" pitchFamily="34" charset="-120"/>
               </a:rPr>
-              <a:t>R-022</a:t>
+              <a:t>R-002</a:t>
             </a:r>
             <a:endParaRPr lang="en-US" sz="1050" dirty="0"/>
           </a:p>
@@ -17801,7 +17801,7 @@
                 <a:ea typeface="Poppins" pitchFamily="34" charset="-122"/>
                 <a:cs typeface="Poppins" pitchFamily="34" charset="-120"/>
               </a:rPr>
-              <a:t>Bisi Adeyemi</a:t>
+              <a:t>Chioma Okonkwo</a:t>
             </a:r>
             <a:endParaRPr lang="en-US" sz="1050" dirty="0"/>
           </a:p>
@@ -17899,7 +17899,7 @@
                 <a:ea typeface="Poppins" pitchFamily="34" charset="-122"/>
                 <a:cs typeface="Poppins" pitchFamily="34" charset="-120"/>
               </a:rPr>
-              <a:t>D-000119</a:t>
+              <a:t>D-000239</a:t>
             </a:r>
             <a:endParaRPr lang="en-US" sz="1050" dirty="0"/>
           </a:p>
@@ -17974,7 +17974,7 @@
                 <a:ea typeface="Poppins" pitchFamily="34" charset="-122"/>
                 <a:cs typeface="Poppins" pitchFamily="34" charset="-120"/>
               </a:rPr>
-              <a:t>Chidi Okonkwo</a:t>
+              <a:t>Fatima Abubakar</a:t>
             </a:r>
             <a:endParaRPr lang="en-US" sz="1050" dirty="0"/>
           </a:p>
@@ -18013,7 +18013,7 @@
                 <a:ea typeface="Poppins" pitchFamily="34" charset="-122"/>
                 <a:cs typeface="Poppins" pitchFamily="34" charset="-120"/>
               </a:rPr>
-              <a:t>Apapa</a:t>
+              <a:t>Ikeja</a:t>
             </a:r>
             <a:endParaRPr lang="en-US" sz="1050" dirty="0"/>
           </a:p>
@@ -18072,7 +18072,7 @@
                 <a:ea typeface="Poppins" pitchFamily="34" charset="-122"/>
                 <a:cs typeface="Poppins" pitchFamily="34" charset="-120"/>
               </a:rPr>
-              <a:t>D-000120</a:t>
+              <a:t>D-000369</a:t>
             </a:r>
             <a:endParaRPr lang="en-US" sz="1050" dirty="0"/>
           </a:p>
@@ -18147,7 +18147,7 @@
                 <a:ea typeface="Poppins" pitchFamily="34" charset="-122"/>
                 <a:cs typeface="Poppins" pitchFamily="34" charset="-120"/>
               </a:rPr>
-              <a:t>Chidi Okonkwo</a:t>
+              <a:t>Fatima Abubakar</a:t>
             </a:r>
             <a:endParaRPr lang="en-US" sz="1050" dirty="0"/>
           </a:p>
@@ -18186,7 +18186,7 @@
                 <a:ea typeface="Poppins" pitchFamily="34" charset="-122"/>
                 <a:cs typeface="Poppins" pitchFamily="34" charset="-120"/>
               </a:rPr>
-              <a:t>Apapa</a:t>
+              <a:t>Ikeja</a:t>
             </a:r>
             <a:endParaRPr lang="en-US" sz="1050" dirty="0"/>
           </a:p>
@@ -18225,7 +18225,7 @@
                 <a:ea typeface="Poppins" pitchFamily="34" charset="-122"/>
                 <a:cs typeface="Poppins" pitchFamily="34" charset="-120"/>
               </a:rPr>
-              <a:t>D-000121</a:t>
+              <a:t>D-000002</a:t>
             </a:r>
             <a:endParaRPr lang="en-US" sz="1050" dirty="0"/>
           </a:p>
@@ -18264,7 +18264,7 @@
                 <a:ea typeface="Poppins" pitchFamily="34" charset="-122"/>
                 <a:cs typeface="Poppins" pitchFamily="34" charset="-120"/>
               </a:rPr>
-              <a:t>R-041</a:t>
+              <a:t>R-003</a:t>
             </a:r>
             <a:endParaRPr lang="en-US" sz="1050" dirty="0"/>
           </a:p>
@@ -18303,7 +18303,7 @@
                 <a:ea typeface="Poppins" pitchFamily="34" charset="-122"/>
                 <a:cs typeface="Poppins" pitchFamily="34" charset="-120"/>
               </a:rPr>
-              <a:t>Musa Bello</a:t>
+              <a:t>Ngozi Yusuf</a:t>
             </a:r>
             <a:endParaRPr lang="en-US" sz="1050" dirty="0"/>
           </a:p>
@@ -18401,7 +18401,7 @@
                 <a:ea typeface="Poppins" pitchFamily="34" charset="-122"/>
                 <a:cs typeface="Poppins" pitchFamily="34" charset="-120"/>
               </a:rPr>
-              <a:t>D-000122</a:t>
+              <a:t>D-000495</a:t>
             </a:r>
             <a:endParaRPr lang="en-US" sz="1050" dirty="0"/>
           </a:p>
@@ -18476,7 +18476,7 @@
                 <a:ea typeface="Poppins" pitchFamily="34" charset="-122"/>
                 <a:cs typeface="Poppins" pitchFamily="34" charset="-120"/>
               </a:rPr>
-              <a:t>Chidi Okonkwo</a:t>
+              <a:t>Fatima Abubakar</a:t>
             </a:r>
             <a:endParaRPr lang="en-US" sz="1050" dirty="0"/>
           </a:p>
@@ -18515,7 +18515,7 @@
                 <a:ea typeface="Poppins" pitchFamily="34" charset="-122"/>
                 <a:cs typeface="Poppins" pitchFamily="34" charset="-120"/>
               </a:rPr>
-              <a:t>Apapa</a:t>
+              <a:t>Ikeja</a:t>
             </a:r>
             <a:endParaRPr lang="en-US" sz="1050" dirty="0"/>
           </a:p>
@@ -18616,7 +18616,7 @@
                 <a:ea typeface="Poppins" pitchFamily="34" charset="-122"/>
                 <a:cs typeface="Poppins" pitchFamily="34" charset="-120"/>
               </a:rPr>
-              <a:t>Chidi  appears 617 times, once for every delivery he made in 2025.</a:t>
+              <a:t>Fatima appears 617 times, once for every delivery she made in 2025.</a:t>
             </a:r>
             <a:endParaRPr lang="en-US" sz="1450" dirty="0"/>
           </a:p>
